--- a/test/pptx/slide-level-0/h1-h2-with-table/templated.pptx
+++ b/test/pptx/slide-level-0/h1-h2-with-table/templated.pptx
@@ -5726,50 +5726,50 @@
       </p:grpSpPr>
       <p:sp>
         <p:nvSpPr>
-          <p:cNvPr id="2" name="Title 1"/>
+          <p:cNvPr id="8" name="Title 1"/>
           <p:cNvSpPr>
             <a:spLocks noGrp="1"/>
           </p:cNvSpPr>
           <p:nvPr>
             <p:ph type="title"/>
+          </p:nvPr>
+        </p:nvSpPr>
+        <p:spPr/>
+        <p:txBody>
+          <a:bodyPr/>
+          <a:lstStyle/>
+          <a:p>
+            <a:pPr lvl="0" indent="0" marL="0">
+              <a:buNone/>
+            </a:pPr>
+            <a:r>
+              <a:rPr/>
+              <a:t>Hello</a:t>
+            </a:r>
+          </a:p>
+        </p:txBody>
+      </p:sp>
+      <p:sp>
+        <p:nvSpPr>
+          <p:cNvPr id="3" name="Content Placeholder 2"/>
+          <p:cNvSpPr>
+            <a:spLocks noGrp="1"/>
+          </p:cNvSpPr>
+          <p:nvPr>
+            <p:ph idx="1"/>
           </p:nvPr>
         </p:nvSpPr>
         <p:spPr>
           <a:xfrm>
-            <a:off x="839788" y="457200"/>
-            <a:ext cx="3932237" cy="1600200"/>
+            <a:off x="1117600" y="1816100"/>
+            <a:ext cx="10223500" cy="2044700"/>
           </a:xfrm>
         </p:spPr>
         <p:txBody>
           <a:bodyPr/>
           <a:lstStyle/>
           <a:p>
-            <a:pPr lvl="0" marL="0" indent="0">
-              <a:buNone/>
-            </a:pPr>
-            <a:r>
-              <a:rPr/>
-              <a:t>Hello</a:t>
-            </a:r>
-          </a:p>
-        </p:txBody>
-      </p:sp>
-      <p:sp>
-        <p:nvSpPr>
-          <p:cNvPr id="4" name="Text Placeholder 3"/>
-          <p:cNvSpPr>
-            <a:spLocks noGrp="1"/>
-          </p:cNvSpPr>
-          <p:nvPr>
-            <p:ph idx="2" sz="half" type="body"/>
-          </p:nvPr>
-        </p:nvSpPr>
-        <p:spPr/>
-        <p:txBody>
-          <a:bodyPr/>
-          <a:lstStyle/>
-          <a:p>
-            <a:pPr lvl="0" marL="0" indent="0">
+            <a:pPr lvl="0" indent="0" marL="0">
               <a:spcBef>
                 <a:spcPts val="3000"/>
               </a:spcBef>
@@ -5793,8 +5793,8 @@
           </p:nvPr>
         </p:nvGraphicFramePr>
         <p:xfrm>
-          <a:off x="5181600" y="977900"/>
-          <a:ext cx="6172200" cy="4864100"/>
+          <a:off x="1117600" y="3987800"/>
+          <a:ext cx="10223500" cy="2044700"/>
         </p:xfrm>
         <a:graphic>
           <a:graphicData uri="http://schemas.openxmlformats.org/drawingml/2006/table">
@@ -5803,7 +5803,7 @@
                 <a:tableStyleId>{5C22544A-7EE6-4342-B048-85BDC9FD1C3A}</a:tableStyleId>
               </a:tblPr>
               <a:tblGrid>
-                <a:gridCol w="6172200"/>
+                <a:gridCol w="10223500"/>
               </a:tblGrid>
               <a:tr h="0">
                 <a:tc>
@@ -5811,7 +5811,7 @@
                     <a:bodyPr/>
                     <a:lstStyle/>
                     <a:p>
-                      <a:pPr lvl="0" marL="0" indent="0">
+                      <a:pPr lvl="0" indent="0" marL="0">
                         <a:buNone/>
                       </a:pPr>
                       <a:r>
